--- a/dist/초1/수학/수와연산/초1_수학_수와연산_06_50까지의수_학생용.pptx
+++ b/dist/초1/수학/수와연산/초1_수학_수와연산_06_50까지의수_학생용.pptx
@@ -120,13 +120,13 @@
   <p:extLst>
     <p:ext uri="{521415D9-36F7-43E2-AB2F-B90AF26B5E84}">
       <p14:sectionLst xmlns:p14="http://schemas.microsoft.com/office/powerpoint/2010/main">
-        <p14:section name="도입" id="{040024b0-fdb5-b2e7-3e7d-fafd312fbc05}">
+        <p14:section name="도입" id="{a5251af7-5221-47b9-37ee-e09fa2b123ab}">
           <p14:sldIdLst>
             <p14:sldId id="256"/>
             <p14:sldId id="257"/>
           </p14:sldIdLst>
         </p14:section>
-        <p14:section name="개념" id="{65a9445c-6790-fd59-8309-4c1e7a1a1be7}">
+        <p14:section name="개념" id="{46b04fc6-14d9-9730-913d-949e2f0e75b3}">
           <p14:sldIdLst>
             <p14:sldId id="258"/>
             <p14:sldId id="259"/>
@@ -135,25 +135,25 @@
             <p14:sldId id="262"/>
           </p14:sldIdLst>
         </p14:section>
-        <p14:section name="연습" id="{b2813580-ac64-8e2f-a076-2150930b7d77}">
+        <p14:section name="연습" id="{c107cdce-04d7-a2df-b257-fe3e81faf7b1}">
           <p14:sldIdLst>
             <p14:sldId id="263"/>
             <p14:sldId id="264"/>
             <p14:sldId id="265"/>
           </p14:sldIdLst>
         </p14:section>
-        <p14:section name="확인" id="{cda60ab3-acba-3a41-dacd-c1ef788ec1b9}">
+        <p14:section name="확인" id="{4c2c5fbd-22e3-5af8-6fdd-54d560066066}">
           <p14:sldIdLst>
             <p14:sldId id="266"/>
             <p14:sldId id="267"/>
           </p14:sldIdLst>
         </p14:section>
-        <p14:section name="정리" id="{3ed9ade4-c443-120c-e239-ef204ab46a6f}">
+        <p14:section name="정리" id="{0527d156-9367-b93b-8e36-b3b185533d33}">
           <p14:sldIdLst>
             <p14:sldId id="268"/>
           </p14:sldIdLst>
         </p14:section>
-        <p14:section name="보충" id="{9f37ddbb-672a-d34e-cfb9-3e7861c68593}">
+        <p14:section name="보충" id="{25f8fdd1-7fbc-d0cd-2724-5d396de1bd1b}">
           <p14:sldIdLst>
             <p14:sldId id="269"/>
           </p14:sldIdLst>
@@ -2785,7 +2785,7 @@
           <a:bodyPr wrap="square" lIns="0" tIns="0" rIns="0" bIns="0" rtlCol="0" anchor="ctr"/>
           <a:lstStyle/>
           <a:p>
-            <a:pPr algn="l" indent="0" marL="0">
+            <a:pPr eaLnBrk="0" algn="l" indent="0" marL="0">
               <a:buNone/>
             </a:pPr>
             <a:r>
@@ -2826,7 +2826,7 @@
           <a:bodyPr wrap="square" lIns="0" tIns="0" rIns="0" bIns="0" rtlCol="0" anchor="t"/>
           <a:lstStyle/>
           <a:p>
-            <a:pPr indent="0" marL="0">
+            <a:pPr eaLnBrk="0" indent="0" marL="0">
               <a:buNone/>
             </a:pPr>
             <a:r>
@@ -3460,7 +3460,7 @@
           <a:bodyPr wrap="square" lIns="0" tIns="0" rIns="0" bIns="0" rtlCol="0" anchor="ctr"/>
           <a:lstStyle/>
           <a:p>
-            <a:pPr indent="0" marL="0">
+            <a:pPr eaLnBrk="0" indent="0" marL="0">
               <a:spcAft>
                 <a:spcPts val="600"/>
               </a:spcAft>
@@ -3480,7 +3480,7 @@
             <a:endParaRPr lang="ko-KR" sz="3200" dirty="0"/>
           </a:p>
           <a:p>
-            <a:pPr indent="0" marL="0">
+            <a:pPr eaLnBrk="0" indent="0" marL="0">
               <a:spcAft>
                 <a:spcPts val="600"/>
               </a:spcAft>
@@ -3500,7 +3500,7 @@
             <a:endParaRPr lang="ko-KR" sz="3200" dirty="0"/>
           </a:p>
           <a:p>
-            <a:pPr indent="0" marL="0">
+            <a:pPr eaLnBrk="0" indent="0" marL="0">
               <a:spcAft>
                 <a:spcPts val="600"/>
               </a:spcAft>
@@ -3569,7 +3569,7 @@
           <a:bodyPr wrap="square" lIns="0" tIns="0" rIns="0" bIns="0" rtlCol="0" anchor="ctr"/>
           <a:lstStyle/>
           <a:p>
-            <a:pPr algn="l" indent="0" marL="0">
+            <a:pPr eaLnBrk="0" algn="l" indent="0" marL="0">
               <a:buNone/>
             </a:pPr>
             <a:r>
@@ -3635,7 +3635,7 @@
           <a:bodyPr wrap="square" lIns="0" tIns="0" rIns="0" bIns="0" rtlCol="0" anchor="ctr"/>
           <a:lstStyle/>
           <a:p>
-            <a:pPr indent="0" marL="0">
+            <a:pPr eaLnBrk="0" indent="0" marL="0">
               <a:spcAft>
                 <a:spcPts val="600"/>
               </a:spcAft>
@@ -3704,7 +3704,7 @@
           <a:bodyPr wrap="square" lIns="0" tIns="0" rIns="0" bIns="0" rtlCol="0" anchor="ctr"/>
           <a:lstStyle/>
           <a:p>
-            <a:pPr indent="0" marL="0">
+            <a:pPr eaLnBrk="0" indent="0" marL="0">
               <a:spcAft>
                 <a:spcPts val="600"/>
               </a:spcAft>
@@ -3754,7 +3754,7 @@
           <a:bodyPr wrap="square" lIns="177800" tIns="0" rIns="177800" bIns="0" rtlCol="0" anchor="ctr"/>
           <a:lstStyle/>
           <a:p>
-            <a:pPr algn="l" indent="0" marL="0">
+            <a:pPr eaLnBrk="0" algn="l" indent="0" marL="0">
               <a:buNone/>
             </a:pPr>
             <a:r>
@@ -3793,7 +3793,7 @@
           <a:bodyPr wrap="square" lIns="0" tIns="0" rIns="0" bIns="0" rtlCol="0" anchor="ctr"/>
           <a:lstStyle/>
           <a:p>
-            <a:pPr algn="ctr" indent="0" marL="0">
+            <a:pPr eaLnBrk="0" algn="ctr" indent="0" marL="0">
               <a:buNone/>
             </a:pPr>
             <a:r>
@@ -3840,7 +3840,7 @@
           <a:bodyPr wrap="square" lIns="177800" tIns="0" rIns="177800" bIns="0" rtlCol="0" anchor="ctr"/>
           <a:lstStyle/>
           <a:p>
-            <a:pPr algn="l" indent="0" marL="0">
+            <a:pPr eaLnBrk="0" algn="l" indent="0" marL="0">
               <a:buNone/>
             </a:pPr>
             <a:r>
@@ -3879,7 +3879,7 @@
           <a:bodyPr wrap="square" lIns="0" tIns="0" rIns="0" bIns="0" rtlCol="0" anchor="ctr"/>
           <a:lstStyle/>
           <a:p>
-            <a:pPr algn="ctr" indent="0" marL="0">
+            <a:pPr eaLnBrk="0" algn="ctr" indent="0" marL="0">
               <a:buNone/>
             </a:pPr>
             <a:r>
@@ -3936,7 +3936,7 @@
             </a:lvl1pPr>
           </a:lstStyle>
           <a:p>
-            <a:pPr algn="r"/>
+            <a:pPr eaLnBrk="0" algn="r"/>
             <a:fld id="{F7021451-1387-4CA6-816F-3879F97B5CBC}" type="slidenum">
               <a:rPr b="0" lang="en-US"/>
               <a:t>10</a:t>
@@ -3993,7 +3993,7 @@
           <a:bodyPr wrap="square" lIns="0" tIns="0" rIns="0" bIns="0" rtlCol="0" anchor="ctr"/>
           <a:lstStyle/>
           <a:p>
-            <a:pPr algn="l" indent="0" marL="0">
+            <a:pPr eaLnBrk="0" algn="l" indent="0" marL="0">
               <a:buNone/>
             </a:pPr>
             <a:r>
@@ -4032,7 +4032,7 @@
           <a:bodyPr wrap="square" lIns="0" tIns="0" rIns="0" bIns="0" rtlCol="0" anchor="ctr"/>
           <a:lstStyle/>
           <a:p>
-            <a:pPr algn="l" indent="0" marL="0">
+            <a:pPr eaLnBrk="0" algn="l" indent="0" marL="0">
               <a:buNone/>
             </a:pPr>
             <a:r>
@@ -4079,7 +4079,7 @@
           <a:bodyPr wrap="square" lIns="0" tIns="0" rIns="0" bIns="0" rtlCol="0" anchor="ctr"/>
           <a:lstStyle/>
           <a:p>
-            <a:pPr algn="ctr" indent="0" marL="0">
+            <a:pPr eaLnBrk="0" algn="ctr" indent="0" marL="0">
               <a:buNone/>
             </a:pPr>
             <a:r>
@@ -4118,7 +4118,7 @@
           <a:bodyPr wrap="square" lIns="0" tIns="0" rIns="0" bIns="0" rtlCol="0" anchor="ctr"/>
           <a:lstStyle/>
           <a:p>
-            <a:pPr algn="l" indent="0" marL="0">
+            <a:pPr eaLnBrk="0" algn="l" indent="0" marL="0">
               <a:buNone/>
             </a:pPr>
             <a:r>
@@ -4165,7 +4165,7 @@
           <a:bodyPr wrap="square" lIns="0" tIns="0" rIns="0" bIns="0" rtlCol="0" anchor="ctr"/>
           <a:lstStyle/>
           <a:p>
-            <a:pPr algn="ctr" indent="0" marL="0">
+            <a:pPr eaLnBrk="0" algn="ctr" indent="0" marL="0">
               <a:buNone/>
             </a:pPr>
             <a:r>
@@ -4204,7 +4204,7 @@
           <a:bodyPr wrap="square" lIns="0" tIns="0" rIns="0" bIns="0" rtlCol="0" anchor="ctr"/>
           <a:lstStyle/>
           <a:p>
-            <a:pPr algn="l" indent="0" marL="0">
+            <a:pPr eaLnBrk="0" algn="l" indent="0" marL="0">
               <a:buNone/>
             </a:pPr>
             <a:r>
@@ -4251,7 +4251,7 @@
           <a:bodyPr wrap="square" lIns="0" tIns="0" rIns="0" bIns="0" rtlCol="0" anchor="ctr"/>
           <a:lstStyle/>
           <a:p>
-            <a:pPr algn="ctr" indent="0" marL="0">
+            <a:pPr eaLnBrk="0" algn="ctr" indent="0" marL="0">
               <a:buNone/>
             </a:pPr>
             <a:r>
@@ -4290,7 +4290,7 @@
           <a:bodyPr wrap="square" lIns="0" tIns="0" rIns="0" bIns="0" rtlCol="0" anchor="ctr"/>
           <a:lstStyle/>
           <a:p>
-            <a:pPr algn="l" indent="0" marL="0">
+            <a:pPr eaLnBrk="0" algn="l" indent="0" marL="0">
               <a:buNone/>
             </a:pPr>
             <a:r>
@@ -4347,7 +4347,7 @@
             </a:lvl1pPr>
           </a:lstStyle>
           <a:p>
-            <a:pPr algn="r"/>
+            <a:pPr eaLnBrk="0" algn="r"/>
             <a:fld id="{F7021451-1387-4CA6-816F-3879F97B5CBC}" type="slidenum">
               <a:rPr b="0" lang="en-US"/>
               <a:t>11</a:t>
@@ -4404,7 +4404,7 @@
           <a:bodyPr wrap="square" lIns="0" tIns="0" rIns="0" bIns="0" rtlCol="0" anchor="ctr"/>
           <a:lstStyle/>
           <a:p>
-            <a:pPr algn="l" indent="0" marL="0">
+            <a:pPr eaLnBrk="0" algn="l" indent="0" marL="0">
               <a:buNone/>
             </a:pPr>
             <a:r>
@@ -4470,7 +4470,7 @@
           <a:bodyPr wrap="square" lIns="0" tIns="0" rIns="0" bIns="0" rtlCol="0" anchor="ctr"/>
           <a:lstStyle/>
           <a:p>
-            <a:pPr indent="0" marL="0">
+            <a:pPr eaLnBrk="0" indent="0" marL="0">
               <a:spcAft>
                 <a:spcPts val="600"/>
               </a:spcAft>
@@ -4520,7 +4520,7 @@
           <a:bodyPr wrap="square" lIns="0" tIns="0" rIns="0" bIns="0" rtlCol="0" anchor="ctr"/>
           <a:lstStyle/>
           <a:p>
-            <a:pPr algn="ctr" indent="0" marL="0">
+            <a:pPr eaLnBrk="0" algn="ctr" indent="0" marL="0">
               <a:buNone/>
             </a:pPr>
             <a:r>
@@ -5599,7 +5599,7 @@
           <a:bodyPr wrap="square" lIns="0" tIns="0" rIns="0" bIns="0" rtlCol="0" anchor="ctr"/>
           <a:lstStyle/>
           <a:p>
-            <a:pPr algn="ctr" indent="0" marL="0">
+            <a:pPr eaLnBrk="0" algn="ctr" indent="0" marL="0">
               <a:buNone/>
             </a:pPr>
             <a:r>
@@ -6471,7 +6471,7 @@
           <a:bodyPr wrap="square" lIns="0" tIns="0" rIns="0" bIns="0" rtlCol="0" anchor="ctr"/>
           <a:lstStyle/>
           <a:p>
-            <a:pPr algn="ctr" indent="0" marL="0">
+            <a:pPr eaLnBrk="0" algn="ctr" indent="0" marL="0">
               <a:buNone/>
             </a:pPr>
             <a:r>
@@ -7378,7 +7378,7 @@
             </a:lvl1pPr>
           </a:lstStyle>
           <a:p>
-            <a:pPr algn="r"/>
+            <a:pPr eaLnBrk="0" algn="r"/>
             <a:fld id="{F7021451-1387-4CA6-816F-3879F97B5CBC}" type="slidenum">
               <a:rPr b="0" lang="en-US"/>
               <a:t>12</a:t>
@@ -7435,7 +7435,7 @@
           <a:bodyPr wrap="square" lIns="0" tIns="0" rIns="0" bIns="0" rtlCol="0" anchor="ctr"/>
           <a:lstStyle/>
           <a:p>
-            <a:pPr algn="l" indent="0" marL="0">
+            <a:pPr eaLnBrk="0" algn="l" indent="0" marL="0">
               <a:buNone/>
             </a:pPr>
             <a:r>
@@ -7501,7 +7501,7 @@
           <a:bodyPr wrap="square" lIns="0" tIns="0" rIns="0" bIns="0" rtlCol="0" anchor="ctr"/>
           <a:lstStyle/>
           <a:p>
-            <a:pPr indent="0" marL="0">
+            <a:pPr eaLnBrk="0" indent="0" marL="0">
               <a:spcAft>
                 <a:spcPts val="600"/>
               </a:spcAft>
@@ -7551,7 +7551,7 @@
           <a:bodyPr wrap="square" lIns="177800" tIns="0" rIns="177800" bIns="0" rtlCol="0" anchor="ctr"/>
           <a:lstStyle/>
           <a:p>
-            <a:pPr algn="l" indent="0" marL="0">
+            <a:pPr eaLnBrk="0" algn="l" indent="0" marL="0">
               <a:buNone/>
             </a:pPr>
             <a:r>
@@ -7598,7 +7598,7 @@
           <a:bodyPr wrap="square" lIns="177800" tIns="0" rIns="177800" bIns="0" rtlCol="0" anchor="ctr"/>
           <a:lstStyle/>
           <a:p>
-            <a:pPr algn="l" indent="0" marL="0">
+            <a:pPr eaLnBrk="0" algn="l" indent="0" marL="0">
               <a:buNone/>
             </a:pPr>
             <a:r>
@@ -7637,7 +7637,7 @@
           <a:bodyPr wrap="square" lIns="0" tIns="0" rIns="0" bIns="0" rtlCol="0" anchor="t"/>
           <a:lstStyle/>
           <a:p>
-            <a:pPr algn="l" indent="0" marL="0">
+            <a:pPr eaLnBrk="0" algn="l" indent="0" marL="0">
               <a:buNone/>
             </a:pPr>
             <a:r>
@@ -7676,7 +7676,7 @@
           <a:bodyPr wrap="square" lIns="0" tIns="0" rIns="0" bIns="0" rtlCol="0" anchor="ctr"/>
           <a:lstStyle/>
           <a:p>
-            <a:pPr algn="l" indent="0" marL="0">
+            <a:pPr eaLnBrk="0" algn="l" indent="0" marL="0">
               <a:buNone/>
             </a:pPr>
             <a:r>
@@ -7693,7 +7693,7 @@
             <a:endParaRPr lang="ko-KR" sz="2600" dirty="0"/>
           </a:p>
           <a:p>
-            <a:pPr algn="l" indent="0" marL="0">
+            <a:pPr eaLnBrk="0" algn="l" indent="0" marL="0">
               <a:buNone/>
             </a:pPr>
             <a:r>
@@ -7732,7 +7732,7 @@
           <a:bodyPr wrap="square" lIns="0" tIns="0" rIns="0" bIns="0" rtlCol="0" anchor="ctr"/>
           <a:lstStyle/>
           <a:p>
-            <a:pPr algn="l" indent="0" marL="0">
+            <a:pPr eaLnBrk="0" algn="l" indent="0" marL="0">
               <a:buNone/>
             </a:pPr>
             <a:r>
@@ -7771,7 +7771,7 @@
           <a:bodyPr wrap="square" lIns="0" tIns="0" rIns="0" bIns="0" rtlCol="0" anchor="ctr"/>
           <a:lstStyle/>
           <a:p>
-            <a:pPr algn="l" indent="0" marL="0">
+            <a:pPr eaLnBrk="0" algn="l" indent="0" marL="0">
               <a:buNone/>
             </a:pPr>
             <a:r>
@@ -7810,7 +7810,7 @@
           <a:bodyPr wrap="square" lIns="0" tIns="0" rIns="0" bIns="0" rtlCol="0" anchor="ctr"/>
           <a:lstStyle/>
           <a:p>
-            <a:pPr algn="l" indent="0" marL="0">
+            <a:pPr eaLnBrk="0" algn="l" indent="0" marL="0">
               <a:buNone/>
             </a:pPr>
             <a:r>
@@ -7867,7 +7867,7 @@
             </a:lvl1pPr>
           </a:lstStyle>
           <a:p>
-            <a:pPr algn="r"/>
+            <a:pPr eaLnBrk="0" algn="r"/>
             <a:fld id="{F7021451-1387-4CA6-816F-3879F97B5CBC}" type="slidenum">
               <a:rPr b="0" lang="en-US"/>
               <a:t>13</a:t>
@@ -7924,7 +7924,7 @@
           <a:bodyPr wrap="square" lIns="0" tIns="0" rIns="0" bIns="0" rtlCol="0" anchor="ctr"/>
           <a:lstStyle/>
           <a:p>
-            <a:pPr algn="l" indent="0" marL="0">
+            <a:pPr eaLnBrk="0" algn="l" indent="0" marL="0">
               <a:buNone/>
             </a:pPr>
             <a:r>
@@ -7963,7 +7963,7 @@
           <a:bodyPr wrap="square" lIns="0" tIns="0" rIns="0" bIns="0" rtlCol="0" anchor="ctr"/>
           <a:lstStyle/>
           <a:p>
-            <a:pPr algn="l" indent="0" marL="0">
+            <a:pPr eaLnBrk="0" algn="l" indent="0" marL="0">
               <a:buNone/>
             </a:pPr>
             <a:r>
@@ -8029,7 +8029,7 @@
           <a:bodyPr wrap="square" lIns="0" tIns="0" rIns="0" bIns="0" rtlCol="0" anchor="ctr"/>
           <a:lstStyle/>
           <a:p>
-            <a:pPr indent="0" marL="0">
+            <a:pPr eaLnBrk="0" indent="0" marL="0">
               <a:spcAft>
                 <a:spcPts val="600"/>
               </a:spcAft>
@@ -8098,7 +8098,7 @@
           <a:bodyPr wrap="square" lIns="0" tIns="0" rIns="0" bIns="0" rtlCol="0" anchor="ctr"/>
           <a:lstStyle/>
           <a:p>
-            <a:pPr indent="0" marL="0">
+            <a:pPr eaLnBrk="0" indent="0" marL="0">
               <a:spcAft>
                 <a:spcPts val="600"/>
               </a:spcAft>
@@ -8167,7 +8167,7 @@
           <a:bodyPr wrap="square" lIns="0" tIns="0" rIns="0" bIns="0" rtlCol="0" anchor="ctr"/>
           <a:lstStyle/>
           <a:p>
-            <a:pPr indent="0" marL="0">
+            <a:pPr eaLnBrk="0" indent="0" marL="0">
               <a:spcAft>
                 <a:spcPts val="600"/>
               </a:spcAft>
@@ -8690,7 +8690,7 @@
       </p:sp>
       <p:sp>
         <p:nvSpPr>
-          <p:cNvPr id="30" name="S15-figure610" descr="십 칸 틀에 10개"/>
+          <p:cNvPr id="30" name="S15-figure610" descr="1개의 십 칸 틀 중 1번째: 모두 10개"/>
           <p:cNvSpPr/>
           <p:nvPr/>
         </p:nvSpPr>
@@ -8754,7 +8754,7 @@
             </a:lvl1pPr>
           </a:lstStyle>
           <a:p>
-            <a:pPr algn="r"/>
+            <a:pPr eaLnBrk="0" algn="r"/>
             <a:fld id="{F7021451-1387-4CA6-816F-3879F97B5CBC}" type="slidenum">
               <a:rPr b="0" lang="en-US"/>
               <a:t>14</a:t>
@@ -8811,7 +8811,7 @@
           <a:bodyPr wrap="square" lIns="0" tIns="0" rIns="0" bIns="0" rtlCol="0" anchor="ctr"/>
           <a:lstStyle/>
           <a:p>
-            <a:pPr algn="l" indent="0" marL="0">
+            <a:pPr eaLnBrk="0" algn="l" indent="0" marL="0">
               <a:buNone/>
             </a:pPr>
             <a:r>
@@ -8858,7 +8858,7 @@
           <a:bodyPr wrap="square" lIns="0" tIns="0" rIns="0" bIns="0" rtlCol="0" anchor="ctr"/>
           <a:lstStyle/>
           <a:p>
-            <a:pPr algn="ctr" indent="0" marL="0">
+            <a:pPr eaLnBrk="0" algn="ctr" indent="0" marL="0">
               <a:buNone/>
             </a:pPr>
             <a:r>
@@ -9378,7 +9378,7 @@
       </p:sp>
       <p:sp>
         <p:nvSpPr>
-          <p:cNvPr id="24" name="S02-figure48" descr="십 칸 틀에 10개"/>
+          <p:cNvPr id="24" name="S02-figure48" descr="1개의 십 칸 틀 중 1번째: 모두 10개"/>
           <p:cNvSpPr/>
           <p:nvPr/>
         </p:nvSpPr>
@@ -9432,7 +9432,7 @@
           <a:bodyPr wrap="square" lIns="0" tIns="0" rIns="0" bIns="0" rtlCol="0" anchor="ctr"/>
           <a:lstStyle/>
           <a:p>
-            <a:pPr algn="ctr" indent="0" marL="0">
+            <a:pPr eaLnBrk="0" algn="ctr" indent="0" marL="0">
               <a:buNone/>
             </a:pPr>
             <a:r>
@@ -9471,7 +9471,7 @@
           <a:bodyPr wrap="square" lIns="0" tIns="0" rIns="0" bIns="0" rtlCol="0" anchor="ctr"/>
           <a:lstStyle/>
           <a:p>
-            <a:pPr algn="l" indent="0" marL="0">
+            <a:pPr eaLnBrk="0" algn="l" indent="0" marL="0">
               <a:buNone/>
             </a:pPr>
             <a:r>
@@ -9518,7 +9518,7 @@
           <a:bodyPr wrap="square" lIns="0" tIns="0" rIns="0" bIns="0" rtlCol="0" anchor="ctr"/>
           <a:lstStyle/>
           <a:p>
-            <a:pPr algn="ctr" indent="0" marL="0">
+            <a:pPr eaLnBrk="0" algn="ctr" indent="0" marL="0">
               <a:buNone/>
             </a:pPr>
             <a:r>
@@ -9557,7 +9557,7 @@
           <a:bodyPr wrap="square" lIns="0" tIns="0" rIns="0" bIns="0" rtlCol="0" anchor="ctr"/>
           <a:lstStyle/>
           <a:p>
-            <a:pPr algn="l" indent="0" marL="0">
+            <a:pPr eaLnBrk="0" algn="l" indent="0" marL="0">
               <a:buNone/>
             </a:pPr>
             <a:r>
@@ -9614,7 +9614,7 @@
             </a:lvl1pPr>
           </a:lstStyle>
           <a:p>
-            <a:pPr algn="r"/>
+            <a:pPr eaLnBrk="0" algn="r"/>
             <a:fld id="{F7021451-1387-4CA6-816F-3879F97B5CBC}" type="slidenum">
               <a:rPr b="0" lang="en-US"/>
               <a:t>2</a:t>
@@ -9671,7 +9671,7 @@
           <a:bodyPr wrap="square" lIns="0" tIns="0" rIns="0" bIns="0" rtlCol="0" anchor="ctr"/>
           <a:lstStyle/>
           <a:p>
-            <a:pPr algn="l" indent="0" marL="0">
+            <a:pPr eaLnBrk="0" algn="l" indent="0" marL="0">
               <a:buNone/>
             </a:pPr>
             <a:r>
@@ -9737,7 +9737,7 @@
           <a:bodyPr wrap="square" lIns="0" tIns="0" rIns="0" bIns="0" rtlCol="0" anchor="ctr"/>
           <a:lstStyle/>
           <a:p>
-            <a:pPr indent="0" marL="0">
+            <a:pPr eaLnBrk="0" indent="0" marL="0">
               <a:spcAft>
                 <a:spcPts val="600"/>
               </a:spcAft>
@@ -9757,7 +9757,7 @@
             <a:endParaRPr lang="ko-KR" sz="3200" dirty="0"/>
           </a:p>
           <a:p>
-            <a:pPr indent="0" marL="0">
+            <a:pPr eaLnBrk="0" indent="0" marL="0">
               <a:spcAft>
                 <a:spcPts val="600"/>
               </a:spcAft>
@@ -10280,7 +10280,7 @@
       </p:sp>
       <p:sp>
         <p:nvSpPr>
-          <p:cNvPr id="25" name="S03-figure75" descr="십 칸 틀에 10개"/>
+          <p:cNvPr id="25" name="S03-figure75" descr="1개의 십 칸 틀 중 1번째: 모두 10개"/>
           <p:cNvSpPr/>
           <p:nvPr/>
         </p:nvSpPr>
@@ -10326,7 +10326,7 @@
           <a:bodyPr wrap="square" lIns="0" tIns="0" rIns="0" bIns="0" rtlCol="0" anchor="ctr"/>
           <a:lstStyle/>
           <a:p>
-            <a:pPr algn="ctr" indent="0" marL="0">
+            <a:pPr eaLnBrk="0" algn="ctr" indent="0" marL="0">
               <a:buNone/>
             </a:pPr>
             <a:r>
@@ -10671,7 +10671,7 @@
       </p:sp>
       <p:sp>
         <p:nvSpPr>
-          <p:cNvPr id="40" name="S03-figure90" descr="십 칸 틀에 3개"/>
+          <p:cNvPr id="40" name="S03-figure90" descr="1개의 십 칸 틀 중 1번째: 모두 3개"/>
           <p:cNvSpPr/>
           <p:nvPr/>
         </p:nvSpPr>
@@ -10717,7 +10717,7 @@
           <a:bodyPr wrap="square" lIns="0" tIns="0" rIns="0" bIns="0" rtlCol="0" anchor="ctr"/>
           <a:lstStyle/>
           <a:p>
-            <a:pPr algn="ctr" indent="0" marL="0">
+            <a:pPr eaLnBrk="0" algn="ctr" indent="0" marL="0">
               <a:buNone/>
             </a:pPr>
             <a:r>
@@ -10774,7 +10774,7 @@
             </a:lvl1pPr>
           </a:lstStyle>
           <a:p>
-            <a:pPr algn="r"/>
+            <a:pPr eaLnBrk="0" algn="r"/>
             <a:fld id="{F7021451-1387-4CA6-816F-3879F97B5CBC}" type="slidenum">
               <a:rPr b="0" lang="en-US"/>
               <a:t>3</a:t>
@@ -10831,7 +10831,7 @@
           <a:bodyPr wrap="square" lIns="0" tIns="0" rIns="0" bIns="0" rtlCol="0" anchor="ctr"/>
           <a:lstStyle/>
           <a:p>
-            <a:pPr algn="l" indent="0" marL="0">
+            <a:pPr eaLnBrk="0" algn="l" indent="0" marL="0">
               <a:buNone/>
             </a:pPr>
             <a:r>
@@ -10897,7 +10897,7 @@
           <a:bodyPr wrap="square" lIns="0" tIns="0" rIns="0" bIns="0" rtlCol="0" anchor="ctr"/>
           <a:lstStyle/>
           <a:p>
-            <a:pPr indent="0" marL="0">
+            <a:pPr eaLnBrk="0" indent="0" marL="0">
               <a:spcAft>
                 <a:spcPts val="600"/>
               </a:spcAft>
@@ -10951,7 +10951,7 @@
                     <a:bodyPr/>
                     <a:lstStyle/>
                     <a:p>
-                      <a:pPr algn="ctr" indent="0" marL="0">
+                      <a:pPr eaLnBrk="0" algn="ctr" indent="0" marL="0">
                         <a:buNone/>
                       </a:pPr>
                       <a:r>
@@ -11019,7 +11019,7 @@
                     <a:bodyPr/>
                     <a:lstStyle/>
                     <a:p>
-                      <a:pPr algn="ctr" indent="0" marL="0">
+                      <a:pPr eaLnBrk="0" algn="ctr" indent="0" marL="0">
                         <a:buNone/>
                       </a:pPr>
                       <a:r>
@@ -11087,7 +11087,7 @@
                     <a:bodyPr/>
                     <a:lstStyle/>
                     <a:p>
-                      <a:pPr algn="ctr" indent="0" marL="0">
+                      <a:pPr eaLnBrk="0" algn="ctr" indent="0" marL="0">
                         <a:buNone/>
                       </a:pPr>
                       <a:r>
@@ -11157,7 +11157,7 @@
                     <a:bodyPr/>
                     <a:lstStyle/>
                     <a:p>
-                      <a:pPr algn="ctr" indent="0" marL="0">
+                      <a:pPr eaLnBrk="0" algn="ctr" indent="0" marL="0">
                         <a:buNone/>
                       </a:pPr>
                       <a:r>
@@ -11225,7 +11225,7 @@
                     <a:bodyPr/>
                     <a:lstStyle/>
                     <a:p>
-                      <a:pPr algn="ctr" indent="0" marL="0">
+                      <a:pPr eaLnBrk="0" algn="ctr" indent="0" marL="0">
                         <a:buNone/>
                       </a:pPr>
                       <a:r>
@@ -11293,7 +11293,7 @@
                     <a:bodyPr/>
                     <a:lstStyle/>
                     <a:p>
-                      <a:pPr algn="ctr" indent="0" marL="0">
+                      <a:pPr eaLnBrk="0" algn="ctr" indent="0" marL="0">
                         <a:buNone/>
                       </a:pPr>
                       <a:r>
@@ -11363,7 +11363,7 @@
                     <a:bodyPr/>
                     <a:lstStyle/>
                     <a:p>
-                      <a:pPr algn="ctr" indent="0" marL="0">
+                      <a:pPr eaLnBrk="0" algn="ctr" indent="0" marL="0">
                         <a:buNone/>
                       </a:pPr>
                       <a:r>
@@ -11431,7 +11431,7 @@
                     <a:bodyPr/>
                     <a:lstStyle/>
                     <a:p>
-                      <a:pPr algn="ctr" indent="0" marL="0">
+                      <a:pPr eaLnBrk="0" algn="ctr" indent="0" marL="0">
                         <a:buNone/>
                       </a:pPr>
                       <a:r>
@@ -11499,7 +11499,7 @@
                     <a:bodyPr/>
                     <a:lstStyle/>
                     <a:p>
-                      <a:pPr algn="ctr" indent="0" marL="0">
+                      <a:pPr eaLnBrk="0" algn="ctr" indent="0" marL="0">
                         <a:buNone/>
                       </a:pPr>
                       <a:r>
@@ -11569,7 +11569,7 @@
                     <a:bodyPr/>
                     <a:lstStyle/>
                     <a:p>
-                      <a:pPr algn="ctr" indent="0" marL="0">
+                      <a:pPr eaLnBrk="0" algn="ctr" indent="0" marL="0">
                         <a:buNone/>
                       </a:pPr>
                       <a:r>
@@ -11637,7 +11637,7 @@
                     <a:bodyPr/>
                     <a:lstStyle/>
                     <a:p>
-                      <a:pPr algn="ctr" indent="0" marL="0">
+                      <a:pPr eaLnBrk="0" algn="ctr" indent="0" marL="0">
                         <a:buNone/>
                       </a:pPr>
                       <a:r>
@@ -11705,7 +11705,7 @@
                     <a:bodyPr/>
                     <a:lstStyle/>
                     <a:p>
-                      <a:pPr algn="ctr" indent="0" marL="0">
+                      <a:pPr eaLnBrk="0" algn="ctr" indent="0" marL="0">
                         <a:buNone/>
                       </a:pPr>
                       <a:r>
@@ -11775,7 +11775,7 @@
                     <a:bodyPr/>
                     <a:lstStyle/>
                     <a:p>
-                      <a:pPr algn="ctr" indent="0" marL="0">
+                      <a:pPr eaLnBrk="0" algn="ctr" indent="0" marL="0">
                         <a:buNone/>
                       </a:pPr>
                       <a:r>
@@ -11843,7 +11843,7 @@
                     <a:bodyPr/>
                     <a:lstStyle/>
                     <a:p>
-                      <a:pPr algn="ctr" indent="0" marL="0">
+                      <a:pPr eaLnBrk="0" algn="ctr" indent="0" marL="0">
                         <a:buNone/>
                       </a:pPr>
                       <a:r>
@@ -11911,7 +11911,7 @@
                     <a:bodyPr/>
                     <a:lstStyle/>
                     <a:p>
-                      <a:pPr algn="ctr" indent="0" marL="0">
+                      <a:pPr eaLnBrk="0" algn="ctr" indent="0" marL="0">
                         <a:buNone/>
                       </a:pPr>
                       <a:r>
@@ -11981,7 +11981,7 @@
                     <a:bodyPr/>
                     <a:lstStyle/>
                     <a:p>
-                      <a:pPr algn="ctr" indent="0" marL="0">
+                      <a:pPr eaLnBrk="0" algn="ctr" indent="0" marL="0">
                         <a:buNone/>
                       </a:pPr>
                       <a:r>
@@ -12049,7 +12049,7 @@
                     <a:bodyPr/>
                     <a:lstStyle/>
                     <a:p>
-                      <a:pPr algn="ctr" indent="0" marL="0">
+                      <a:pPr eaLnBrk="0" algn="ctr" indent="0" marL="0">
                         <a:buNone/>
                       </a:pPr>
                       <a:r>
@@ -12117,7 +12117,7 @@
                     <a:bodyPr/>
                     <a:lstStyle/>
                     <a:p>
-                      <a:pPr algn="ctr" indent="0" marL="0">
+                      <a:pPr eaLnBrk="0" algn="ctr" indent="0" marL="0">
                         <a:buNone/>
                       </a:pPr>
                       <a:r>
@@ -12218,7 +12218,7 @@
                     <a:bodyPr/>
                     <a:lstStyle/>
                     <a:p>
-                      <a:pPr algn="ctr" indent="0" marL="0">
+                      <a:pPr eaLnBrk="0" algn="ctr" indent="0" marL="0">
                         <a:buNone/>
                       </a:pPr>
                       <a:r>
@@ -12286,7 +12286,7 @@
                     <a:bodyPr/>
                     <a:lstStyle/>
                     <a:p>
-                      <a:pPr algn="ctr" indent="0" marL="0">
+                      <a:pPr eaLnBrk="0" algn="ctr" indent="0" marL="0">
                         <a:buNone/>
                       </a:pPr>
                       <a:r>
@@ -12354,7 +12354,7 @@
                     <a:bodyPr/>
                     <a:lstStyle/>
                     <a:p>
-                      <a:pPr algn="ctr" indent="0" marL="0">
+                      <a:pPr eaLnBrk="0" algn="ctr" indent="0" marL="0">
                         <a:buNone/>
                       </a:pPr>
                       <a:r>
@@ -12424,7 +12424,7 @@
                     <a:bodyPr/>
                     <a:lstStyle/>
                     <a:p>
-                      <a:pPr algn="ctr" indent="0" marL="0">
+                      <a:pPr eaLnBrk="0" algn="ctr" indent="0" marL="0">
                         <a:buNone/>
                       </a:pPr>
                       <a:r>
@@ -12492,7 +12492,7 @@
                     <a:bodyPr/>
                     <a:lstStyle/>
                     <a:p>
-                      <a:pPr algn="ctr" indent="0" marL="0">
+                      <a:pPr eaLnBrk="0" algn="ctr" indent="0" marL="0">
                         <a:buNone/>
                       </a:pPr>
                       <a:r>
@@ -12560,7 +12560,7 @@
                     <a:bodyPr/>
                     <a:lstStyle/>
                     <a:p>
-                      <a:pPr algn="ctr" indent="0" marL="0">
+                      <a:pPr eaLnBrk="0" algn="ctr" indent="0" marL="0">
                         <a:buNone/>
                       </a:pPr>
                       <a:r>
@@ -12630,7 +12630,7 @@
                     <a:bodyPr/>
                     <a:lstStyle/>
                     <a:p>
-                      <a:pPr algn="ctr" indent="0" marL="0">
+                      <a:pPr eaLnBrk="0" algn="ctr" indent="0" marL="0">
                         <a:buNone/>
                       </a:pPr>
                       <a:r>
@@ -12698,7 +12698,7 @@
                     <a:bodyPr/>
                     <a:lstStyle/>
                     <a:p>
-                      <a:pPr algn="ctr" indent="0" marL="0">
+                      <a:pPr eaLnBrk="0" algn="ctr" indent="0" marL="0">
                         <a:buNone/>
                       </a:pPr>
                       <a:r>
@@ -12766,7 +12766,7 @@
                     <a:bodyPr/>
                     <a:lstStyle/>
                     <a:p>
-                      <a:pPr algn="ctr" indent="0" marL="0">
+                      <a:pPr eaLnBrk="0" algn="ctr" indent="0" marL="0">
                         <a:buNone/>
                       </a:pPr>
                       <a:r>
@@ -12836,7 +12836,7 @@
                     <a:bodyPr/>
                     <a:lstStyle/>
                     <a:p>
-                      <a:pPr algn="ctr" indent="0" marL="0">
+                      <a:pPr eaLnBrk="0" algn="ctr" indent="0" marL="0">
                         <a:buNone/>
                       </a:pPr>
                       <a:r>
@@ -12904,7 +12904,7 @@
                     <a:bodyPr/>
                     <a:lstStyle/>
                     <a:p>
-                      <a:pPr algn="ctr" indent="0" marL="0">
+                      <a:pPr eaLnBrk="0" algn="ctr" indent="0" marL="0">
                         <a:buNone/>
                       </a:pPr>
                       <a:r>
@@ -12972,7 +12972,7 @@
                     <a:bodyPr/>
                     <a:lstStyle/>
                     <a:p>
-                      <a:pPr algn="ctr" indent="0" marL="0">
+                      <a:pPr eaLnBrk="0" algn="ctr" indent="0" marL="0">
                         <a:buNone/>
                       </a:pPr>
                       <a:r>
@@ -13042,7 +13042,7 @@
                     <a:bodyPr/>
                     <a:lstStyle/>
                     <a:p>
-                      <a:pPr algn="ctr" indent="0" marL="0">
+                      <a:pPr eaLnBrk="0" algn="ctr" indent="0" marL="0">
                         <a:buNone/>
                       </a:pPr>
                       <a:r>
@@ -13110,7 +13110,7 @@
                     <a:bodyPr/>
                     <a:lstStyle/>
                     <a:p>
-                      <a:pPr algn="ctr" indent="0" marL="0">
+                      <a:pPr eaLnBrk="0" algn="ctr" indent="0" marL="0">
                         <a:buNone/>
                       </a:pPr>
                       <a:r>
@@ -13178,7 +13178,7 @@
                     <a:bodyPr/>
                     <a:lstStyle/>
                     <a:p>
-                      <a:pPr algn="ctr" indent="0" marL="0">
+                      <a:pPr eaLnBrk="0" algn="ctr" indent="0" marL="0">
                         <a:buNone/>
                       </a:pPr>
                       <a:r>
@@ -13285,7 +13285,7 @@
             </a:lvl1pPr>
           </a:lstStyle>
           <a:p>
-            <a:pPr algn="r"/>
+            <a:pPr eaLnBrk="0" algn="r"/>
             <a:fld id="{F7021451-1387-4CA6-816F-3879F97B5CBC}" type="slidenum">
               <a:rPr b="0" lang="en-US"/>
               <a:t>4</a:t>
@@ -13342,7 +13342,7 @@
           <a:bodyPr wrap="square" lIns="0" tIns="0" rIns="0" bIns="0" rtlCol="0" anchor="ctr"/>
           <a:lstStyle/>
           <a:p>
-            <a:pPr algn="l" indent="0" marL="0">
+            <a:pPr eaLnBrk="0" algn="l" indent="0" marL="0">
               <a:buNone/>
             </a:pPr>
             <a:r>
@@ -13381,7 +13381,7 @@
           <a:bodyPr wrap="square" lIns="0" tIns="0" rIns="0" bIns="0" rtlCol="0" anchor="ctr"/>
           <a:lstStyle/>
           <a:p>
-            <a:pPr algn="l" indent="0" marL="0">
+            <a:pPr eaLnBrk="0" algn="l" indent="0" marL="0">
               <a:buNone/>
             </a:pPr>
             <a:r>
@@ -13447,7 +13447,7 @@
           <a:bodyPr wrap="square" lIns="0" tIns="0" rIns="0" bIns="0" rtlCol="0" anchor="ctr"/>
           <a:lstStyle/>
           <a:p>
-            <a:pPr indent="0" marL="0">
+            <a:pPr eaLnBrk="0" indent="0" marL="0">
               <a:spcAft>
                 <a:spcPts val="600"/>
               </a:spcAft>
@@ -13982,7 +13982,7 @@
           <a:bodyPr wrap="square" lIns="0" tIns="0" rIns="0" bIns="0" rtlCol="0" anchor="ctr"/>
           <a:lstStyle/>
           <a:p>
-            <a:pPr algn="ctr" indent="0" marL="0">
+            <a:pPr eaLnBrk="0" algn="ctr" indent="0" marL="0">
               <a:buNone/>
             </a:pPr>
             <a:r>
@@ -14746,7 +14746,7 @@
           <a:bodyPr wrap="square" lIns="0" tIns="0" rIns="0" bIns="0" rtlCol="0" anchor="ctr"/>
           <a:lstStyle/>
           <a:p>
-            <a:pPr algn="ctr" indent="0" marL="0">
+            <a:pPr eaLnBrk="0" algn="ctr" indent="0" marL="0">
               <a:buNone/>
             </a:pPr>
             <a:r>
@@ -15742,7 +15742,7 @@
           <a:bodyPr wrap="square" lIns="0" tIns="0" rIns="0" bIns="0" rtlCol="0" anchor="ctr"/>
           <a:lstStyle/>
           <a:p>
-            <a:pPr algn="ctr" indent="0" marL="0">
+            <a:pPr eaLnBrk="0" algn="ctr" indent="0" marL="0">
               <a:buNone/>
             </a:pPr>
             <a:r>
@@ -16970,7 +16970,7 @@
           <a:bodyPr wrap="square" lIns="0" tIns="0" rIns="0" bIns="0" rtlCol="0" anchor="ctr"/>
           <a:lstStyle/>
           <a:p>
-            <a:pPr algn="ctr" indent="0" marL="0">
+            <a:pPr eaLnBrk="0" algn="ctr" indent="0" marL="0">
               <a:buNone/>
             </a:pPr>
             <a:r>
@@ -17027,7 +17027,7 @@
             </a:lvl1pPr>
           </a:lstStyle>
           <a:p>
-            <a:pPr algn="r"/>
+            <a:pPr eaLnBrk="0" algn="r"/>
             <a:fld id="{F7021451-1387-4CA6-816F-3879F97B5CBC}" type="slidenum">
               <a:rPr b="0" lang="en-US"/>
               <a:t>5</a:t>
@@ -17084,7 +17084,7 @@
           <a:bodyPr wrap="square" lIns="0" tIns="0" rIns="0" bIns="0" rtlCol="0" anchor="ctr"/>
           <a:lstStyle/>
           <a:p>
-            <a:pPr algn="l" indent="0" marL="0">
+            <a:pPr eaLnBrk="0" algn="l" indent="0" marL="0">
               <a:buNone/>
             </a:pPr>
             <a:r>
@@ -17123,7 +17123,7 @@
           <a:bodyPr wrap="square" lIns="0" tIns="0" rIns="0" bIns="0" rtlCol="0" anchor="ctr"/>
           <a:lstStyle/>
           <a:p>
-            <a:pPr algn="l" indent="0" marL="0">
+            <a:pPr eaLnBrk="0" algn="l" indent="0" marL="0">
               <a:buNone/>
             </a:pPr>
             <a:r>
@@ -17189,7 +17189,7 @@
           <a:bodyPr wrap="square" lIns="0" tIns="0" rIns="0" bIns="0" rtlCol="0" anchor="ctr"/>
           <a:lstStyle/>
           <a:p>
-            <a:pPr indent="0" marL="0">
+            <a:pPr eaLnBrk="0" indent="0" marL="0">
               <a:spcAft>
                 <a:spcPts val="600"/>
               </a:spcAft>
@@ -17209,7 +17209,7 @@
             <a:endParaRPr lang="ko-KR" sz="3200" dirty="0"/>
           </a:p>
           <a:p>
-            <a:pPr indent="0" marL="0">
+            <a:pPr eaLnBrk="0" indent="0" marL="0">
               <a:spcAft>
                 <a:spcPts val="600"/>
               </a:spcAft>
@@ -17838,7 +17838,7 @@
           <a:bodyPr wrap="square" lIns="0" tIns="0" rIns="0" bIns="0" rtlCol="0" anchor="ctr"/>
           <a:lstStyle/>
           <a:p>
-            <a:pPr algn="ctr" indent="0" marL="0">
+            <a:pPr eaLnBrk="0" algn="ctr" indent="0" marL="0">
               <a:buNone/>
             </a:pPr>
             <a:r>
@@ -17981,7 +17981,7 @@
           <a:bodyPr wrap="square" lIns="0" tIns="0" rIns="0" bIns="0" rtlCol="0" anchor="ctr"/>
           <a:lstStyle/>
           <a:p>
-            <a:pPr algn="ctr" indent="0" marL="0">
+            <a:pPr eaLnBrk="0" algn="ctr" indent="0" marL="0">
               <a:buNone/>
             </a:pPr>
             <a:r>
@@ -18038,7 +18038,7 @@
             </a:lvl1pPr>
           </a:lstStyle>
           <a:p>
-            <a:pPr algn="r"/>
+            <a:pPr eaLnBrk="0" algn="r"/>
             <a:fld id="{F7021451-1387-4CA6-816F-3879F97B5CBC}" type="slidenum">
               <a:rPr b="0" lang="en-US"/>
               <a:t>6</a:t>
@@ -18095,7 +18095,7 @@
           <a:bodyPr wrap="square" lIns="0" tIns="0" rIns="0" bIns="0" rtlCol="0" anchor="ctr"/>
           <a:lstStyle/>
           <a:p>
-            <a:pPr algn="l" indent="0" marL="0">
+            <a:pPr eaLnBrk="0" algn="l" indent="0" marL="0">
               <a:buNone/>
             </a:pPr>
             <a:r>
@@ -18161,7 +18161,7 @@
           <a:bodyPr wrap="square" lIns="0" tIns="0" rIns="0" bIns="0" rtlCol="0" anchor="ctr"/>
           <a:lstStyle/>
           <a:p>
-            <a:pPr indent="0" marL="0">
+            <a:pPr eaLnBrk="0" indent="0" marL="0">
               <a:spcAft>
                 <a:spcPts val="600"/>
               </a:spcAft>
@@ -18181,7 +18181,7 @@
             <a:endParaRPr lang="ko-KR" sz="3200" dirty="0"/>
           </a:p>
           <a:p>
-            <a:pPr indent="0" marL="0">
+            <a:pPr eaLnBrk="0" indent="0" marL="0">
               <a:spcAft>
                 <a:spcPts val="600"/>
               </a:spcAft>
@@ -19059,7 +19059,7 @@
                     <a:bodyPr/>
                     <a:lstStyle/>
                     <a:p>
-                      <a:pPr algn="ctr" indent="0" marL="0">
+                      <a:pPr eaLnBrk="0" algn="ctr" indent="0" marL="0">
                         <a:buNone/>
                       </a:pPr>
                       <a:r>
@@ -19127,7 +19127,7 @@
                     <a:bodyPr/>
                     <a:lstStyle/>
                     <a:p>
-                      <a:pPr algn="ctr" indent="0" marL="0">
+                      <a:pPr eaLnBrk="0" algn="ctr" indent="0" marL="0">
                         <a:buNone/>
                       </a:pPr>
                       <a:r>
@@ -19197,7 +19197,7 @@
                     <a:bodyPr/>
                     <a:lstStyle/>
                     <a:p>
-                      <a:pPr algn="ctr" indent="0" marL="0">
+                      <a:pPr eaLnBrk="0" algn="ctr" indent="0" marL="0">
                         <a:buNone/>
                       </a:pPr>
                       <a:r>
@@ -19265,7 +19265,7 @@
                     <a:bodyPr/>
                     <a:lstStyle/>
                     <a:p>
-                      <a:pPr algn="ctr" indent="0" marL="0">
+                      <a:pPr eaLnBrk="0" algn="ctr" indent="0" marL="0">
                         <a:buNone/>
                       </a:pPr>
                       <a:r>
@@ -19372,7 +19372,7 @@
             </a:lvl1pPr>
           </a:lstStyle>
           <a:p>
-            <a:pPr algn="r"/>
+            <a:pPr eaLnBrk="0" algn="r"/>
             <a:fld id="{F7021451-1387-4CA6-816F-3879F97B5CBC}" type="slidenum">
               <a:rPr b="0" lang="en-US"/>
               <a:t>7</a:t>
@@ -19429,7 +19429,7 @@
           <a:bodyPr wrap="square" lIns="0" tIns="0" rIns="0" bIns="0" rtlCol="0" anchor="ctr"/>
           <a:lstStyle/>
           <a:p>
-            <a:pPr algn="l" indent="0" marL="0">
+            <a:pPr eaLnBrk="0" algn="l" indent="0" marL="0">
               <a:buNone/>
             </a:pPr>
             <a:r>
@@ -19468,7 +19468,7 @@
           <a:bodyPr wrap="square" lIns="0" tIns="0" rIns="0" bIns="0" rtlCol="0" anchor="ctr"/>
           <a:lstStyle/>
           <a:p>
-            <a:pPr algn="l" indent="0" marL="0">
+            <a:pPr eaLnBrk="0" algn="l" indent="0" marL="0">
               <a:buNone/>
             </a:pPr>
             <a:r>
@@ -19534,7 +19534,7 @@
           <a:bodyPr wrap="square" lIns="0" tIns="0" rIns="0" bIns="0" rtlCol="0" anchor="ctr"/>
           <a:lstStyle/>
           <a:p>
-            <a:pPr indent="0" marL="0">
+            <a:pPr eaLnBrk="0" indent="0" marL="0">
               <a:spcAft>
                 <a:spcPts val="600"/>
               </a:spcAft>
@@ -19584,7 +19584,7 @@
           <a:bodyPr wrap="square" lIns="0" tIns="0" rIns="0" bIns="0" rtlCol="0" anchor="ctr"/>
           <a:lstStyle/>
           <a:p>
-            <a:pPr algn="ctr" indent="0" marL="0">
+            <a:pPr eaLnBrk="0" algn="ctr" indent="0" marL="0">
               <a:buNone/>
             </a:pPr>
             <a:r>
@@ -20104,7 +20104,7 @@
       </p:sp>
       <p:sp>
         <p:nvSpPr>
-          <p:cNvPr id="27" name="S08-figure341" descr="꽉 찬 십 칸 틀(10개)"/>
+          <p:cNvPr id="27" name="S08-figure341" descr="1개의 십 칸 틀 중 1번째: 모두 10개"/>
           <p:cNvSpPr/>
           <p:nvPr/>
         </p:nvSpPr>
@@ -20506,7 +20506,7 @@
       </p:sp>
       <p:sp>
         <p:nvSpPr>
-          <p:cNvPr id="43" name="S08-figure357" descr="십 칸 틀에 5개"/>
+          <p:cNvPr id="43" name="S08-figure357" descr="1개의 십 칸 틀 중 1번째: 모두 5개"/>
           <p:cNvSpPr/>
           <p:nvPr/>
         </p:nvSpPr>
@@ -20560,7 +20560,7 @@
           <a:bodyPr wrap="square" lIns="0" tIns="0" rIns="0" bIns="0" rtlCol="0" anchor="ctr"/>
           <a:lstStyle/>
           <a:p>
-            <a:pPr algn="ctr" indent="0" marL="0">
+            <a:pPr eaLnBrk="0" algn="ctr" indent="0" marL="0">
               <a:buNone/>
             </a:pPr>
             <a:r>
@@ -21250,7 +21250,7 @@
           <a:bodyPr wrap="square" lIns="0" tIns="0" rIns="0" bIns="0" rtlCol="0" anchor="ctr"/>
           <a:lstStyle/>
           <a:p>
-            <a:pPr algn="ctr" indent="0" marL="0">
+            <a:pPr eaLnBrk="0" algn="ctr" indent="0" marL="0">
               <a:buNone/>
             </a:pPr>
             <a:r>
@@ -22289,7 +22289,7 @@
             </a:lvl1pPr>
           </a:lstStyle>
           <a:p>
-            <a:pPr algn="r"/>
+            <a:pPr eaLnBrk="0" algn="r"/>
             <a:fld id="{F7021451-1387-4CA6-816F-3879F97B5CBC}" type="slidenum">
               <a:rPr b="0" lang="en-US"/>
               <a:t>8</a:t>
@@ -22346,7 +22346,7 @@
           <a:bodyPr wrap="square" lIns="0" tIns="0" rIns="0" bIns="0" rtlCol="0" anchor="ctr"/>
           <a:lstStyle/>
           <a:p>
-            <a:pPr algn="l" indent="0" marL="0">
+            <a:pPr eaLnBrk="0" algn="l" indent="0" marL="0">
               <a:buNone/>
             </a:pPr>
             <a:r>
@@ -22412,7 +22412,7 @@
           <a:bodyPr wrap="square" lIns="0" tIns="0" rIns="0" bIns="0" rtlCol="0" anchor="ctr"/>
           <a:lstStyle/>
           <a:p>
-            <a:pPr indent="0" marL="0">
+            <a:pPr eaLnBrk="0" indent="0" marL="0">
               <a:spcAft>
                 <a:spcPts val="600"/>
               </a:spcAft>
@@ -22462,7 +22462,7 @@
           <a:bodyPr wrap="square" lIns="0" tIns="0" rIns="0" bIns="0" rtlCol="0" anchor="ctr"/>
           <a:lstStyle/>
           <a:p>
-            <a:pPr algn="ctr" indent="0" marL="0">
+            <a:pPr eaLnBrk="0" algn="ctr" indent="0" marL="0">
               <a:buNone/>
             </a:pPr>
             <a:r>
@@ -22501,7 +22501,7 @@
           <a:bodyPr wrap="square" lIns="0" tIns="0" rIns="0" bIns="0" rtlCol="0" anchor="ctr"/>
           <a:lstStyle/>
           <a:p>
-            <a:pPr algn="l" indent="0" marL="0">
+            <a:pPr eaLnBrk="0" algn="l" indent="0" marL="0">
               <a:buNone/>
             </a:pPr>
             <a:r>
@@ -22548,7 +22548,7 @@
           <a:bodyPr wrap="square" lIns="0" tIns="0" rIns="0" bIns="0" rtlCol="0" anchor="ctr"/>
           <a:lstStyle/>
           <a:p>
-            <a:pPr algn="ctr" indent="0" marL="0">
+            <a:pPr eaLnBrk="0" algn="ctr" indent="0" marL="0">
               <a:buNone/>
             </a:pPr>
             <a:r>
@@ -22587,7 +22587,7 @@
           <a:bodyPr wrap="square" lIns="0" tIns="0" rIns="0" bIns="0" rtlCol="0" anchor="ctr"/>
           <a:lstStyle/>
           <a:p>
-            <a:pPr algn="l" indent="0" marL="0">
+            <a:pPr eaLnBrk="0" algn="l" indent="0" marL="0">
               <a:buNone/>
             </a:pPr>
             <a:r>
@@ -22634,7 +22634,7 @@
           <a:bodyPr wrap="square" lIns="0" tIns="0" rIns="0" bIns="0" rtlCol="0" anchor="ctr"/>
           <a:lstStyle/>
           <a:p>
-            <a:pPr algn="ctr" indent="0" marL="0">
+            <a:pPr eaLnBrk="0" algn="ctr" indent="0" marL="0">
               <a:buNone/>
             </a:pPr>
             <a:r>
@@ -22673,7 +22673,7 @@
           <a:bodyPr wrap="square" lIns="0" tIns="0" rIns="0" bIns="0" rtlCol="0" anchor="ctr"/>
           <a:lstStyle/>
           <a:p>
-            <a:pPr algn="l" indent="0" marL="0">
+            <a:pPr eaLnBrk="0" algn="l" indent="0" marL="0">
               <a:buNone/>
             </a:pPr>
             <a:r>
@@ -22720,7 +22720,7 @@
           <a:bodyPr wrap="square" lIns="0" tIns="0" rIns="0" bIns="0" rtlCol="0" anchor="ctr"/>
           <a:lstStyle/>
           <a:p>
-            <a:pPr algn="ctr" indent="0" marL="0">
+            <a:pPr eaLnBrk="0" algn="ctr" indent="0" marL="0">
               <a:buNone/>
             </a:pPr>
             <a:r>
@@ -22759,7 +22759,7 @@
           <a:bodyPr wrap="square" lIns="0" tIns="0" rIns="0" bIns="0" rtlCol="0" anchor="ctr"/>
           <a:lstStyle/>
           <a:p>
-            <a:pPr algn="l" indent="0" marL="0">
+            <a:pPr eaLnBrk="0" algn="l" indent="0" marL="0">
               <a:buNone/>
             </a:pPr>
             <a:r>
@@ -22816,7 +22816,7 @@
             </a:lvl1pPr>
           </a:lstStyle>
           <a:p>
-            <a:pPr algn="r"/>
+            <a:pPr eaLnBrk="0" algn="r"/>
             <a:fld id="{F7021451-1387-4CA6-816F-3879F97B5CBC}" type="slidenum">
               <a:rPr b="0" lang="en-US"/>
               <a:t>9</a:t>

--- a/dist/초1/수학/수와연산/초1_수학_수와연산_06_50까지의수_학생용.pptx
+++ b/dist/초1/수학/수와연산/초1_수학_수와연산_06_50까지의수_학생용.pptx
@@ -120,13 +120,13 @@
   <p:extLst>
     <p:ext uri="{521415D9-36F7-43E2-AB2F-B90AF26B5E84}">
       <p14:sectionLst xmlns:p14="http://schemas.microsoft.com/office/powerpoint/2010/main">
-        <p14:section name="도입" id="{a5251af7-5221-47b9-37ee-e09fa2b123ab}">
+        <p14:section name="도입" id="{eae2881c-f0d0-0cdc-9f30-ff73d4e1e345}">
           <p14:sldIdLst>
             <p14:sldId id="256"/>
             <p14:sldId id="257"/>
           </p14:sldIdLst>
         </p14:section>
-        <p14:section name="개념" id="{46b04fc6-14d9-9730-913d-949e2f0e75b3}">
+        <p14:section name="개념" id="{6cc46e6e-8f8b-a158-ad66-ded45a3d7f99}">
           <p14:sldIdLst>
             <p14:sldId id="258"/>
             <p14:sldId id="259"/>
@@ -135,25 +135,25 @@
             <p14:sldId id="262"/>
           </p14:sldIdLst>
         </p14:section>
-        <p14:section name="연습" id="{c107cdce-04d7-a2df-b257-fe3e81faf7b1}">
+        <p14:section name="연습" id="{9af56ce6-5ce2-fb61-42cd-15fbc2f3df41}">
           <p14:sldIdLst>
             <p14:sldId id="263"/>
             <p14:sldId id="264"/>
             <p14:sldId id="265"/>
           </p14:sldIdLst>
         </p14:section>
-        <p14:section name="확인" id="{4c2c5fbd-22e3-5af8-6fdd-54d560066066}">
+        <p14:section name="확인" id="{630b7b50-9d89-4bee-3233-0037c4181eb5}">
           <p14:sldIdLst>
             <p14:sldId id="266"/>
             <p14:sldId id="267"/>
           </p14:sldIdLst>
         </p14:section>
-        <p14:section name="정리" id="{0527d156-9367-b93b-8e36-b3b185533d33}">
+        <p14:section name="정리" id="{363318f5-e557-4b92-a660-210b67b136c3}">
           <p14:sldIdLst>
             <p14:sldId id="268"/>
           </p14:sldIdLst>
         </p14:section>
-        <p14:section name="보충" id="{25f8fdd1-7fbc-d0cd-2724-5d396de1bd1b}">
+        <p14:section name="보충" id="{270460cb-9673-8565-b9a3-a29d3f035c8b}">
           <p14:sldIdLst>
             <p14:sldId id="269"/>
           </p14:sldIdLst>
@@ -8837,7 +8837,7 @@
         </p:nvSpPr>
         <p:spPr>
           <a:xfrm>
-            <a:off x="548640" y="1773936"/>
+            <a:off x="548640" y="1796796"/>
             <a:ext cx="566928" cy="566928"/>
           </a:xfrm>
           <a:prstGeom prst="roundRect">
@@ -8884,8 +8884,8 @@
         </p:nvSpPr>
         <p:spPr>
           <a:xfrm>
-            <a:off x="1618488" y="1325880"/>
-            <a:ext cx="731520" cy="731520"/>
+            <a:off x="2201418" y="1325880"/>
+            <a:ext cx="754380" cy="754380"/>
           </a:xfrm>
           <a:prstGeom prst="rect">
             <a:avLst/>
@@ -8909,8 +8909,8 @@
         </p:nvSpPr>
         <p:spPr>
           <a:xfrm>
-            <a:off x="1742846" y="1450238"/>
-            <a:ext cx="482803" cy="482803"/>
+            <a:off x="2329663" y="1454125"/>
+            <a:ext cx="497891" cy="497891"/>
           </a:xfrm>
           <a:prstGeom prst="ellipse">
             <a:avLst/>
@@ -8934,8 +8934,8 @@
         </p:nvSpPr>
         <p:spPr>
           <a:xfrm>
-            <a:off x="2350008" y="1325880"/>
-            <a:ext cx="731520" cy="731520"/>
+            <a:off x="2955798" y="1325880"/>
+            <a:ext cx="754380" cy="754380"/>
           </a:xfrm>
           <a:prstGeom prst="rect">
             <a:avLst/>
@@ -8959,8 +8959,8 @@
         </p:nvSpPr>
         <p:spPr>
           <a:xfrm>
-            <a:off x="2474366" y="1450238"/>
-            <a:ext cx="482803" cy="482803"/>
+            <a:off x="3084043" y="1454125"/>
+            <a:ext cx="497891" cy="497891"/>
           </a:xfrm>
           <a:prstGeom prst="ellipse">
             <a:avLst/>
@@ -8984,8 +8984,8 @@
         </p:nvSpPr>
         <p:spPr>
           <a:xfrm>
-            <a:off x="3081528" y="1325880"/>
-            <a:ext cx="731520" cy="731520"/>
+            <a:off x="3710178" y="1325880"/>
+            <a:ext cx="754380" cy="754380"/>
           </a:xfrm>
           <a:prstGeom prst="rect">
             <a:avLst/>
@@ -9009,8 +9009,8 @@
         </p:nvSpPr>
         <p:spPr>
           <a:xfrm>
-            <a:off x="3205886" y="1450238"/>
-            <a:ext cx="482803" cy="482803"/>
+            <a:off x="3838423" y="1454125"/>
+            <a:ext cx="497891" cy="497891"/>
           </a:xfrm>
           <a:prstGeom prst="ellipse">
             <a:avLst/>
@@ -9034,8 +9034,8 @@
         </p:nvSpPr>
         <p:spPr>
           <a:xfrm>
-            <a:off x="3813048" y="1325880"/>
-            <a:ext cx="731520" cy="731520"/>
+            <a:off x="4464558" y="1325880"/>
+            <a:ext cx="754380" cy="754380"/>
           </a:xfrm>
           <a:prstGeom prst="rect">
             <a:avLst/>
@@ -9059,8 +9059,8 @@
         </p:nvSpPr>
         <p:spPr>
           <a:xfrm>
-            <a:off x="3937406" y="1450238"/>
-            <a:ext cx="482803" cy="482803"/>
+            <a:off x="4592803" y="1454125"/>
+            <a:ext cx="497891" cy="497891"/>
           </a:xfrm>
           <a:prstGeom prst="ellipse">
             <a:avLst/>
@@ -9084,8 +9084,8 @@
         </p:nvSpPr>
         <p:spPr>
           <a:xfrm>
-            <a:off x="4544568" y="1325880"/>
-            <a:ext cx="731520" cy="731520"/>
+            <a:off x="5218938" y="1325880"/>
+            <a:ext cx="754380" cy="754380"/>
           </a:xfrm>
           <a:prstGeom prst="rect">
             <a:avLst/>
@@ -9109,8 +9109,8 @@
         </p:nvSpPr>
         <p:spPr>
           <a:xfrm>
-            <a:off x="4668926" y="1450238"/>
-            <a:ext cx="482803" cy="482803"/>
+            <a:off x="5347183" y="1454125"/>
+            <a:ext cx="497891" cy="497891"/>
           </a:xfrm>
           <a:prstGeom prst="ellipse">
             <a:avLst/>
@@ -9134,8 +9134,8 @@
         </p:nvSpPr>
         <p:spPr>
           <a:xfrm>
-            <a:off x="1618488" y="2057400"/>
-            <a:ext cx="731520" cy="731520"/>
+            <a:off x="2201418" y="2080260"/>
+            <a:ext cx="754380" cy="754380"/>
           </a:xfrm>
           <a:prstGeom prst="rect">
             <a:avLst/>
@@ -9159,8 +9159,8 @@
         </p:nvSpPr>
         <p:spPr>
           <a:xfrm>
-            <a:off x="1742846" y="2181758"/>
-            <a:ext cx="482803" cy="482803"/>
+            <a:off x="2329663" y="2208505"/>
+            <a:ext cx="497891" cy="497891"/>
           </a:xfrm>
           <a:prstGeom prst="ellipse">
             <a:avLst/>
@@ -9184,8 +9184,8 @@
         </p:nvSpPr>
         <p:spPr>
           <a:xfrm>
-            <a:off x="2350008" y="2057400"/>
-            <a:ext cx="731520" cy="731520"/>
+            <a:off x="2955798" y="2080260"/>
+            <a:ext cx="754380" cy="754380"/>
           </a:xfrm>
           <a:prstGeom prst="rect">
             <a:avLst/>
@@ -9209,8 +9209,8 @@
         </p:nvSpPr>
         <p:spPr>
           <a:xfrm>
-            <a:off x="2474366" y="2181758"/>
-            <a:ext cx="482803" cy="482803"/>
+            <a:off x="3084043" y="2208505"/>
+            <a:ext cx="497891" cy="497891"/>
           </a:xfrm>
           <a:prstGeom prst="ellipse">
             <a:avLst/>
@@ -9234,8 +9234,8 @@
         </p:nvSpPr>
         <p:spPr>
           <a:xfrm>
-            <a:off x="3081528" y="2057400"/>
-            <a:ext cx="731520" cy="731520"/>
+            <a:off x="3710178" y="2080260"/>
+            <a:ext cx="754380" cy="754380"/>
           </a:xfrm>
           <a:prstGeom prst="rect">
             <a:avLst/>
@@ -9259,8 +9259,8 @@
         </p:nvSpPr>
         <p:spPr>
           <a:xfrm>
-            <a:off x="3205886" y="2181758"/>
-            <a:ext cx="482803" cy="482803"/>
+            <a:off x="3838423" y="2208505"/>
+            <a:ext cx="497891" cy="497891"/>
           </a:xfrm>
           <a:prstGeom prst="ellipse">
             <a:avLst/>
@@ -9284,8 +9284,8 @@
         </p:nvSpPr>
         <p:spPr>
           <a:xfrm>
-            <a:off x="3813048" y="2057400"/>
-            <a:ext cx="731520" cy="731520"/>
+            <a:off x="4464558" y="2080260"/>
+            <a:ext cx="754380" cy="754380"/>
           </a:xfrm>
           <a:prstGeom prst="rect">
             <a:avLst/>
@@ -9309,8 +9309,8 @@
         </p:nvSpPr>
         <p:spPr>
           <a:xfrm>
-            <a:off x="3937406" y="2181758"/>
-            <a:ext cx="482803" cy="482803"/>
+            <a:off x="4592803" y="2208505"/>
+            <a:ext cx="497891" cy="497891"/>
           </a:xfrm>
           <a:prstGeom prst="ellipse">
             <a:avLst/>
@@ -9334,8 +9334,8 @@
         </p:nvSpPr>
         <p:spPr>
           <a:xfrm>
-            <a:off x="4544568" y="2057400"/>
-            <a:ext cx="731520" cy="731520"/>
+            <a:off x="5218938" y="2080260"/>
+            <a:ext cx="754380" cy="754380"/>
           </a:xfrm>
           <a:prstGeom prst="rect">
             <a:avLst/>
@@ -9359,8 +9359,8 @@
         </p:nvSpPr>
         <p:spPr>
           <a:xfrm>
-            <a:off x="4668926" y="2181758"/>
-            <a:ext cx="482803" cy="482803"/>
+            <a:off x="5347183" y="2208505"/>
+            <a:ext cx="497891" cy="497891"/>
           </a:xfrm>
           <a:prstGeom prst="ellipse">
             <a:avLst/>
@@ -9384,8 +9384,8 @@
         </p:nvSpPr>
         <p:spPr>
           <a:xfrm>
-            <a:off x="1618488" y="1325880"/>
-            <a:ext cx="3657600" cy="1463040"/>
+            <a:off x="2201418" y="1325880"/>
+            <a:ext cx="3771900" cy="1508760"/>
           </a:xfrm>
           <a:prstGeom prst="rect">
             <a:avLst/>

--- a/dist/초1/수학/수와연산/초1_수학_수와연산_06_50까지의수_학생용.pptx
+++ b/dist/초1/수학/수와연산/초1_수학_수와연산_06_50까지의수_학생용.pptx
@@ -120,13 +120,13 @@
   <p:extLst>
     <p:ext uri="{521415D9-36F7-43E2-AB2F-B90AF26B5E84}">
       <p14:sectionLst xmlns:p14="http://schemas.microsoft.com/office/powerpoint/2010/main">
-        <p14:section name="도입" id="{eae2881c-f0d0-0cdc-9f30-ff73d4e1e345}">
+        <p14:section name="도입" id="{096bca2c-226a-8b06-b264-032f989d53bd}">
           <p14:sldIdLst>
             <p14:sldId id="256"/>
             <p14:sldId id="257"/>
           </p14:sldIdLst>
         </p14:section>
-        <p14:section name="개념" id="{6cc46e6e-8f8b-a158-ad66-ded45a3d7f99}">
+        <p14:section name="개념" id="{60c6cc28-0606-122b-6ce7-0a9c0667bedc}">
           <p14:sldIdLst>
             <p14:sldId id="258"/>
             <p14:sldId id="259"/>
@@ -135,25 +135,25 @@
             <p14:sldId id="262"/>
           </p14:sldIdLst>
         </p14:section>
-        <p14:section name="연습" id="{9af56ce6-5ce2-fb61-42cd-15fbc2f3df41}">
+        <p14:section name="연습" id="{a7708d6c-c234-b00d-9724-405e3f44ac88}">
           <p14:sldIdLst>
             <p14:sldId id="263"/>
             <p14:sldId id="264"/>
             <p14:sldId id="265"/>
           </p14:sldIdLst>
         </p14:section>
-        <p14:section name="확인" id="{630b7b50-9d89-4bee-3233-0037c4181eb5}">
+        <p14:section name="확인" id="{f0104070-67ca-6450-2daa-927b9043fec8}">
           <p14:sldIdLst>
             <p14:sldId id="266"/>
             <p14:sldId id="267"/>
           </p14:sldIdLst>
         </p14:section>
-        <p14:section name="정리" id="{363318f5-e557-4b92-a660-210b67b136c3}">
+        <p14:section name="정리" id="{ec0fbae5-7d0e-8425-b2e3-da04a830d24b}">
           <p14:sldIdLst>
             <p14:sldId id="268"/>
           </p14:sldIdLst>
         </p14:section>
-        <p14:section name="보충" id="{270460cb-9673-8565-b9a3-a29d3f035c8b}">
+        <p14:section name="보충" id="{3c1375a9-1e11-3366-92d5-3d340624e09a}">
           <p14:sldIdLst>
             <p14:sldId id="269"/>
           </p14:sldIdLst>
@@ -10933,7 +10933,7 @@
           </p:nvPr>
         </p:nvGraphicFramePr>
         <p:xfrm>
-          <a:off x="772668" y="1638300"/>
+          <a:off x="772668" y="1687830"/>
           <a:ext cx="4937760" cy="914400"/>
         </p:xfrm>
         <a:graphic>
@@ -10945,7 +10945,7 @@
                 <a:gridCol w="1645920"/>
                 <a:gridCol w="1645920"/>
               </a:tblGrid>
-              <a:tr h="528320">
+              <a:tr h="511810">
                 <a:tc>
                   <a:txBody>
                     <a:bodyPr/>
@@ -11151,7 +11151,7 @@
                   </a:tcPr>
                 </a:tc>
               </a:tr>
-              <a:tr h="528320">
+              <a:tr h="511810">
                 <a:tc>
                   <a:txBody>
                     <a:bodyPr/>
@@ -11357,7 +11357,7 @@
                   </a:tcPr>
                 </a:tc>
               </a:tr>
-              <a:tr h="528320">
+              <a:tr h="511810">
                 <a:tc>
                   <a:txBody>
                     <a:bodyPr/>
@@ -11563,7 +11563,7 @@
                   </a:tcPr>
                 </a:tc>
               </a:tr>
-              <a:tr h="528320">
+              <a:tr h="511810">
                 <a:tc>
                   <a:txBody>
                     <a:bodyPr/>
@@ -11769,7 +11769,7 @@
                   </a:tcPr>
                 </a:tc>
               </a:tr>
-              <a:tr h="528320">
+              <a:tr h="511810">
                 <a:tc>
                   <a:txBody>
                     <a:bodyPr/>
@@ -11975,7 +11975,7 @@
                   </a:tcPr>
                 </a:tc>
               </a:tr>
-              <a:tr h="528320">
+              <a:tr h="511810">
                 <a:tc>
                   <a:txBody>
                     <a:bodyPr/>
@@ -12200,7 +12200,7 @@
           </p:nvPr>
         </p:nvGraphicFramePr>
         <p:xfrm>
-          <a:off x="6478524" y="1902460"/>
+          <a:off x="6478524" y="1943735"/>
           <a:ext cx="4937760" cy="914400"/>
         </p:xfrm>
         <a:graphic>
@@ -12212,7 +12212,7 @@
                 <a:gridCol w="1645920"/>
                 <a:gridCol w="1645920"/>
               </a:tblGrid>
-              <a:tr h="528320">
+              <a:tr h="511810">
                 <a:tc>
                   <a:txBody>
                     <a:bodyPr/>
@@ -12418,7 +12418,7 @@
                   </a:tcPr>
                 </a:tc>
               </a:tr>
-              <a:tr h="528320">
+              <a:tr h="511810">
                 <a:tc>
                   <a:txBody>
                     <a:bodyPr/>
@@ -12624,7 +12624,7 @@
                   </a:tcPr>
                 </a:tc>
               </a:tr>
-              <a:tr h="528320">
+              <a:tr h="511810">
                 <a:tc>
                   <a:txBody>
                     <a:bodyPr/>
@@ -12830,7 +12830,7 @@
                   </a:tcPr>
                 </a:tc>
               </a:tr>
-              <a:tr h="528320">
+              <a:tr h="511810">
                 <a:tc>
                   <a:txBody>
                     <a:bodyPr/>
@@ -13036,7 +13036,7 @@
                   </a:tcPr>
                 </a:tc>
               </a:tr>
-              <a:tr h="528320">
+              <a:tr h="511810">
                 <a:tc>
                   <a:txBody>
                     <a:bodyPr/>
@@ -19042,7 +19042,7 @@
           </p:nvPr>
         </p:nvGraphicFramePr>
         <p:xfrm>
-          <a:off x="6478524" y="2355342"/>
+          <a:off x="6478524" y="2375662"/>
           <a:ext cx="4937760" cy="914400"/>
         </p:xfrm>
         <a:graphic>
@@ -19053,7 +19053,7 @@
                 <a:gridCol w="2962656"/>
                 <a:gridCol w="1975104"/>
               </a:tblGrid>
-              <a:tr h="650240">
+              <a:tr h="629920">
                 <a:tc>
                   <a:txBody>
                     <a:bodyPr/>
@@ -19191,7 +19191,7 @@
                   </a:tcPr>
                 </a:tc>
               </a:tr>
-              <a:tr h="650240">
+              <a:tr h="629920">
                 <a:tc>
                   <a:txBody>
                     <a:bodyPr/>
